--- a/output/tremfya_ibd_split/deck.pptx
+++ b/output/tremfya_ibd_split/deck.pptx
@@ -142,9 +142,9 @@
           </c:marker>
           <c:cat>
             <c:strRef>
-              <c:f>Sheet1!$A$2:$A$111</c:f>
+              <c:f>Sheet1!$A$2:$A$107</c:f>
               <c:strCache>
-                <c:ptCount val="110"/>
+                <c:ptCount val="106"/>
                 <c:pt idx="0">
                   <c:v>05-03</c:v>
                 </c:pt>
@@ -462,28 +462,16 @@
                 </c:pt>
                 <c:pt idx="105">
                   <c:v>05-08</c:v>
-                </c:pt>
-                <c:pt idx="106">
-                  <c:v>05-15</c:v>
-                </c:pt>
-                <c:pt idx="107">
-                  <c:v>05-22</c:v>
-                </c:pt>
-                <c:pt idx="108">
-                  <c:v>05-29</c:v>
-                </c:pt>
-                <c:pt idx="109">
-                  <c:v>06-05</c:v>
                 </c:pt>
               </c:strCache>
             </c:strRef>
           </c:cat>
           <c:val>
             <c:numRef>
-              <c:f>Sheet1!$B$2:$B$111</c:f>
+              <c:f>Sheet1!$B$2:$B$107</c:f>
               <c:numCache>
                 <c:formatCode>General</c:formatCode>
-                <c:ptCount val="110"/>
+                <c:ptCount val="106"/>
                 <c:pt idx="0">
                   <c:v>2.612332</c:v>
                 </c:pt>
@@ -797,22 +785,10 @@
                   <c:v>2781.238172</c:v>
                 </c:pt>
                 <c:pt idx="104">
-                  <c:v>3026.023212</c:v>
+                  <c:v>3026.023211</c:v>
                 </c:pt>
                 <c:pt idx="105">
                   <c:v>3120.916383</c:v>
-                </c:pt>
-                <c:pt idx="106">
-                  <c:v>3183.334711</c:v>
-                </c:pt>
-                <c:pt idx="107">
-                  <c:v>3247.001405</c:v>
-                </c:pt>
-                <c:pt idx="108">
-                  <c:v>3311.941433</c:v>
-                </c:pt>
-                <c:pt idx="109">
-                  <c:v>3378.180262</c:v>
                 </c:pt>
               </c:numCache>
             </c:numRef>
@@ -845,9 +821,9 @@
           </c:marker>
           <c:cat>
             <c:strRef>
-              <c:f>Sheet1!$A$2:$A$111</c:f>
+              <c:f>Sheet1!$A$2:$A$107</c:f>
               <c:strCache>
-                <c:ptCount val="110"/>
+                <c:ptCount val="106"/>
                 <c:pt idx="0">
                   <c:v>05-03</c:v>
                 </c:pt>
@@ -1165,28 +1141,16 @@
                 </c:pt>
                 <c:pt idx="105">
                   <c:v>05-08</c:v>
-                </c:pt>
-                <c:pt idx="106">
-                  <c:v>05-15</c:v>
-                </c:pt>
-                <c:pt idx="107">
-                  <c:v>05-22</c:v>
-                </c:pt>
-                <c:pt idx="108">
-                  <c:v>05-29</c:v>
-                </c:pt>
-                <c:pt idx="109">
-                  <c:v>06-05</c:v>
                 </c:pt>
               </c:strCache>
             </c:strRef>
           </c:cat>
           <c:val>
             <c:numRef>
-              <c:f>Sheet1!$C$2:$C$111</c:f>
+              <c:f>Sheet1!$C$2:$C$107</c:f>
               <c:numCache>
                 <c:formatCode>General</c:formatCode>
-                <c:ptCount val="110"/>
+                <c:ptCount val="106"/>
                 <c:pt idx="0">
                   <c:v>5.290623</c:v>
                 </c:pt>
@@ -1500,22 +1464,10 @@
                   <c:v>3480.122648</c:v>
                 </c:pt>
                 <c:pt idx="104">
-                  <c:v>3786.418587</c:v>
+                  <c:v>3786.418588</c:v>
                 </c:pt>
                 <c:pt idx="105">
                   <c:v>3905.157025</c:v>
-                </c:pt>
-                <c:pt idx="106">
-                  <c:v>3983.260165</c:v>
-                </c:pt>
-                <c:pt idx="107">
-                  <c:v>4062.925369</c:v>
-                </c:pt>
-                <c:pt idx="108">
-                  <c:v>4144.183876</c:v>
-                </c:pt>
-                <c:pt idx="109">
-                  <c:v>4227.067553</c:v>
                 </c:pt>
               </c:numCache>
             </c:numRef>
@@ -1564,8 +1516,8 @@
         <c:lblAlgn val="ctr"/>
         <c:lblOffset val="100"/>
         <c:noMultiLvlLbl val="0"/>
-        <c:tickLblSkip val="12"/>
-        <c:tickMarkSkip val="12"/>
+        <c:tickLblSkip val="11"/>
+        <c:tickMarkSkip val="11"/>
       </c:catAx>
       <c:valAx>
         <c:axId val="2140495176"/>
@@ -4857,7 +4809,7 @@
                 </a:solidFill>
                 <a:latin typeface="Roboto"/>
               </a:rPr>
-              <a:t>Tremfya's weekly IBD volume has scaled from ~8 to ~7,605 TRx since May 2024. Within IBD, Crohn's pulled level in Oct 2025 and now leads ulcerative colitis.</a:t>
+              <a:t>Tremfya's weekly IBD volume has scaled from ~8 to ~7,026 TRx since May 2024. Within IBD, Crohn's pulled level in Oct 2025 and now leads ulcerative colitis.</a:t>
             </a:r>
           </a:p>
         </p:txBody>
@@ -5031,7 +4983,7 @@
                 </a:solidFill>
                 <a:latin typeface="Roboto"/>
               </a:rPr>
-              <a:t>CD ~4,227 vs UC ~3,378 TRx in the latest week (06-05).</a:t>
+              <a:t>CD ~3,905 vs UC ~3,121 TRx in the latest week (05-08).</a:t>
             </a:r>
           </a:p>
         </p:txBody>
@@ -5226,7 +5178,7 @@
                 </a:solidFill>
                 <a:latin typeface="Montserrat Medium"/>
               </a:rPr>
-              <a:t>~962x ramp</a:t>
+              <a:t>~889x ramp</a:t>
             </a:r>
           </a:p>
         </p:txBody>
@@ -5265,7 +5217,7 @@
                 </a:solidFill>
                 <a:latin typeface="Roboto"/>
               </a:rPr>
-              <a:t>Tremfya's IBD volume rose from ~8 to ~7,605 weekly TRx.</a:t>
+              <a:t>Tremfya's IBD volume rose from ~8 to ~7,026 weekly TRx.</a:t>
             </a:r>
           </a:p>
         </p:txBody>

--- a/output/tremfya_ibd_split/deck.pptx
+++ b/output/tremfya_ibd_split/deck.pptx
@@ -142,9 +142,9 @@
           </c:marker>
           <c:cat>
             <c:strRef>
-              <c:f>Sheet1!$A$2:$A$107</c:f>
+              <c:f>Sheet1!$A$2:$A$111</c:f>
               <c:strCache>
-                <c:ptCount val="106"/>
+                <c:ptCount val="110"/>
                 <c:pt idx="0">
                   <c:v>05-03</c:v>
                 </c:pt>
@@ -462,16 +462,28 @@
                 </c:pt>
                 <c:pt idx="105">
                   <c:v>05-08</c:v>
+                </c:pt>
+                <c:pt idx="106">
+                  <c:v>05-15</c:v>
+                </c:pt>
+                <c:pt idx="107">
+                  <c:v>05-22</c:v>
+                </c:pt>
+                <c:pt idx="108">
+                  <c:v>05-29</c:v>
+                </c:pt>
+                <c:pt idx="109">
+                  <c:v>06-05</c:v>
                 </c:pt>
               </c:strCache>
             </c:strRef>
           </c:cat>
           <c:val>
             <c:numRef>
-              <c:f>Sheet1!$B$2:$B$107</c:f>
+              <c:f>Sheet1!$B$2:$B$111</c:f>
               <c:numCache>
                 <c:formatCode>General</c:formatCode>
-                <c:ptCount val="106"/>
+                <c:ptCount val="110"/>
                 <c:pt idx="0">
                   <c:v>2.612332</c:v>
                 </c:pt>
@@ -785,10 +797,22 @@
                   <c:v>2781.238172</c:v>
                 </c:pt>
                 <c:pt idx="104">
-                  <c:v>3026.023211</c:v>
+                  <c:v>3026.023212</c:v>
                 </c:pt>
                 <c:pt idx="105">
                   <c:v>3120.916383</c:v>
+                </c:pt>
+                <c:pt idx="106">
+                  <c:v>3183.334711</c:v>
+                </c:pt>
+                <c:pt idx="107">
+                  <c:v>3247.001405</c:v>
+                </c:pt>
+                <c:pt idx="108">
+                  <c:v>3311.941433</c:v>
+                </c:pt>
+                <c:pt idx="109">
+                  <c:v>3378.180262</c:v>
                 </c:pt>
               </c:numCache>
             </c:numRef>
@@ -821,9 +845,9 @@
           </c:marker>
           <c:cat>
             <c:strRef>
-              <c:f>Sheet1!$A$2:$A$107</c:f>
+              <c:f>Sheet1!$A$2:$A$111</c:f>
               <c:strCache>
-                <c:ptCount val="106"/>
+                <c:ptCount val="110"/>
                 <c:pt idx="0">
                   <c:v>05-03</c:v>
                 </c:pt>
@@ -1141,16 +1165,28 @@
                 </c:pt>
                 <c:pt idx="105">
                   <c:v>05-08</c:v>
+                </c:pt>
+                <c:pt idx="106">
+                  <c:v>05-15</c:v>
+                </c:pt>
+                <c:pt idx="107">
+                  <c:v>05-22</c:v>
+                </c:pt>
+                <c:pt idx="108">
+                  <c:v>05-29</c:v>
+                </c:pt>
+                <c:pt idx="109">
+                  <c:v>06-05</c:v>
                 </c:pt>
               </c:strCache>
             </c:strRef>
           </c:cat>
           <c:val>
             <c:numRef>
-              <c:f>Sheet1!$C$2:$C$107</c:f>
+              <c:f>Sheet1!$C$2:$C$111</c:f>
               <c:numCache>
                 <c:formatCode>General</c:formatCode>
-                <c:ptCount val="106"/>
+                <c:ptCount val="110"/>
                 <c:pt idx="0">
                   <c:v>5.290623</c:v>
                 </c:pt>
@@ -1464,10 +1500,22 @@
                   <c:v>3480.122648</c:v>
                 </c:pt>
                 <c:pt idx="104">
-                  <c:v>3786.418588</c:v>
+                  <c:v>3786.418587</c:v>
                 </c:pt>
                 <c:pt idx="105">
                   <c:v>3905.157025</c:v>
+                </c:pt>
+                <c:pt idx="106">
+                  <c:v>3983.260165</c:v>
+                </c:pt>
+                <c:pt idx="107">
+                  <c:v>4062.925369</c:v>
+                </c:pt>
+                <c:pt idx="108">
+                  <c:v>4144.183876</c:v>
+                </c:pt>
+                <c:pt idx="109">
+                  <c:v>4227.067553</c:v>
                 </c:pt>
               </c:numCache>
             </c:numRef>
@@ -1516,8 +1564,8 @@
         <c:lblAlgn val="ctr"/>
         <c:lblOffset val="100"/>
         <c:noMultiLvlLbl val="0"/>
-        <c:tickLblSkip val="11"/>
-        <c:tickMarkSkip val="11"/>
+        <c:tickLblSkip val="12"/>
+        <c:tickMarkSkip val="12"/>
       </c:catAx>
       <c:valAx>
         <c:axId val="2140495176"/>
@@ -4809,7 +4857,7 @@
                 </a:solidFill>
                 <a:latin typeface="Roboto"/>
               </a:rPr>
-              <a:t>Tremfya's weekly IBD volume has scaled from ~8 to ~7,026 TRx since May 2024. Within IBD, Crohn's pulled level in Oct 2025 and now leads ulcerative colitis.</a:t>
+              <a:t>Tremfya's weekly IBD volume has scaled from ~8 to ~7,605 TRx since May 2024. Within IBD, Crohn's pulled level in Oct 2025 and now leads ulcerative colitis.</a:t>
             </a:r>
           </a:p>
         </p:txBody>
@@ -4983,7 +5031,7 @@
                 </a:solidFill>
                 <a:latin typeface="Roboto"/>
               </a:rPr>
-              <a:t>CD ~3,905 vs UC ~3,121 TRx in the latest week (05-08).</a:t>
+              <a:t>CD ~4,227 vs UC ~3,378 TRx in the latest week (06-05).</a:t>
             </a:r>
           </a:p>
         </p:txBody>
@@ -5178,7 +5226,7 @@
                 </a:solidFill>
                 <a:latin typeface="Montserrat Medium"/>
               </a:rPr>
-              <a:t>~889x ramp</a:t>
+              <a:t>~962x ramp</a:t>
             </a:r>
           </a:p>
         </p:txBody>
@@ -5217,7 +5265,7 @@
                 </a:solidFill>
                 <a:latin typeface="Roboto"/>
               </a:rPr>
-              <a:t>Tremfya's IBD volume rose from ~8 to ~7,026 weekly TRx.</a:t>
+              <a:t>Tremfya's IBD volume rose from ~8 to ~7,605 weekly TRx.</a:t>
             </a:r>
           </a:p>
         </p:txBody>

--- a/output/tremfya_ibd_split/deck.pptx
+++ b/output/tremfya_ibd_split/deck.pptx
@@ -142,9 +142,9 @@
           </c:marker>
           <c:cat>
             <c:strRef>
-              <c:f>Sheet1!$A$2:$A$111</c:f>
+              <c:f>Sheet1!$A$2:$A$127</c:f>
               <c:strCache>
-                <c:ptCount val="110"/>
+                <c:ptCount val="126"/>
                 <c:pt idx="0">
                   <c:v>05-03</c:v>
                 </c:pt>
@@ -474,345 +474,441 @@
                 </c:pt>
                 <c:pt idx="109">
                   <c:v>06-05</c:v>
+                </c:pt>
+                <c:pt idx="110">
+                  <c:v>06-12</c:v>
+                </c:pt>
+                <c:pt idx="111">
+                  <c:v>06-19</c:v>
+                </c:pt>
+                <c:pt idx="112">
+                  <c:v>06-26</c:v>
+                </c:pt>
+                <c:pt idx="113">
+                  <c:v>07-03</c:v>
+                </c:pt>
+                <c:pt idx="114">
+                  <c:v>07-10</c:v>
+                </c:pt>
+                <c:pt idx="115">
+                  <c:v>07-17</c:v>
+                </c:pt>
+                <c:pt idx="116">
+                  <c:v>07-24</c:v>
+                </c:pt>
+                <c:pt idx="117">
+                  <c:v>07-31</c:v>
+                </c:pt>
+                <c:pt idx="118">
+                  <c:v>08-07</c:v>
+                </c:pt>
+                <c:pt idx="119">
+                  <c:v>08-14</c:v>
+                </c:pt>
+                <c:pt idx="120">
+                  <c:v>08-21</c:v>
+                </c:pt>
+                <c:pt idx="121">
+                  <c:v>08-28</c:v>
+                </c:pt>
+                <c:pt idx="122">
+                  <c:v>09-04</c:v>
+                </c:pt>
+                <c:pt idx="123">
+                  <c:v>09-11</c:v>
+                </c:pt>
+                <c:pt idx="124">
+                  <c:v>09-18</c:v>
+                </c:pt>
+                <c:pt idx="125">
+                  <c:v>09-25</c:v>
                 </c:pt>
               </c:strCache>
             </c:strRef>
           </c:cat>
           <c:val>
             <c:numRef>
-              <c:f>Sheet1!$B$2:$B$111</c:f>
+              <c:f>Sheet1!$B$2:$B$127</c:f>
               <c:numCache>
                 <c:formatCode>General</c:formatCode>
-                <c:ptCount val="110"/>
+                <c:ptCount val="126"/>
                 <c:pt idx="0">
-                  <c:v>2.612332</c:v>
+                  <c:v>4.674607</c:v>
                 </c:pt>
                 <c:pt idx="1">
-                  <c:v>2.702344</c:v>
+                  <c:v>2.620262</c:v>
                 </c:pt>
                 <c:pt idx="2">
-                  <c:v>2.78221</c:v>
+                  <c:v>5.920558</c:v>
                 </c:pt>
                 <c:pt idx="3">
-                  <c:v>2.782865</c:v>
+                  <c:v>2.447269</c:v>
                 </c:pt>
                 <c:pt idx="4">
-                  <c:v>2.15619</c:v>
+                  <c:v>4.338413</c:v>
                 </c:pt>
                 <c:pt idx="5">
-                  <c:v>2.746877</c:v>
+                  <c:v>4.317527</c:v>
                 </c:pt>
                 <c:pt idx="6">
-                  <c:v>2.713723</c:v>
+                  <c:v>4.955441</c:v>
                 </c:pt>
                 <c:pt idx="7">
-                  <c:v>2.529534</c:v>
+                  <c:v>5.411919</c:v>
                 </c:pt>
                 <c:pt idx="8">
-                  <c:v>2.609349</c:v>
+                  <c:v>3.244617</c:v>
                 </c:pt>
                 <c:pt idx="9">
-                  <c:v>1.809377</c:v>
+                  <c:v>1.841074</c:v>
                 </c:pt>
                 <c:pt idx="10">
-                  <c:v>3.008849</c:v>
+                  <c:v>1.802827</c:v>
                 </c:pt>
                 <c:pt idx="11">
-                  <c:v>2.698503</c:v>
+                  <c:v>2.060331</c:v>
                 </c:pt>
                 <c:pt idx="12">
-                  <c:v>2.653199</c:v>
+                  <c:v>1.07932</c:v>
                 </c:pt>
                 <c:pt idx="13">
-                  <c:v>2.616264</c:v>
+                  <c:v>1.883145</c:v>
                 </c:pt>
                 <c:pt idx="14">
-                  <c:v>2.468523</c:v>
+                  <c:v>2.639847</c:v>
                 </c:pt>
                 <c:pt idx="15">
-                  <c:v>2.538201</c:v>
+                  <c:v>1.599968</c:v>
                 </c:pt>
                 <c:pt idx="16">
-                  <c:v>2.450886</c:v>
+                  <c:v>1.441231</c:v>
                 </c:pt>
                 <c:pt idx="17">
-                  <c:v>2.649313</c:v>
+                  <c:v>3.769741</c:v>
                 </c:pt>
                 <c:pt idx="18">
-                  <c:v>2.414876</c:v>
+                  <c:v>1.894665</c:v>
                 </c:pt>
                 <c:pt idx="19">
-                  <c:v>2.900123</c:v>
+                  <c:v>3.128004</c:v>
                 </c:pt>
                 <c:pt idx="20">
-                  <c:v>2.866679</c:v>
+                  <c:v>1.196489</c:v>
                 </c:pt>
                 <c:pt idx="21">
-                  <c:v>2.819985</c:v>
+                  <c:v>1.571683</c:v>
                 </c:pt>
                 <c:pt idx="22">
-                  <c:v>3.126088</c:v>
+                  <c:v>1.606987</c:v>
                 </c:pt>
                 <c:pt idx="23">
-                  <c:v>2.848107</c:v>
+                  <c:v>2.884551</c:v>
                 </c:pt>
                 <c:pt idx="24">
-                  <c:v>3.1381</c:v>
+                  <c:v>3.357742</c:v>
                 </c:pt>
                 <c:pt idx="25">
-                  <c:v>2.93562</c:v>
+                  <c:v>1.40955</c:v>
                 </c:pt>
                 <c:pt idx="26">
-                  <c:v>4.741307</c:v>
+                  <c:v>3.867847</c:v>
                 </c:pt>
                 <c:pt idx="27">
-                  <c:v>4.812503</c:v>
+                  <c:v>2.731182</c:v>
                 </c:pt>
                 <c:pt idx="28">
-                  <c:v>6.445226</c:v>
+                  <c:v>3.505119</c:v>
                 </c:pt>
                 <c:pt idx="29">
-                  <c:v>6.443161</c:v>
+                  <c:v>2.83352</c:v>
                 </c:pt>
                 <c:pt idx="30">
-                  <c:v>3.850622</c:v>
+                  <c:v>2.453276</c:v>
                 </c:pt>
                 <c:pt idx="31">
-                  <c:v>8.508722</c:v>
+                  <c:v>7.94864</c:v>
                 </c:pt>
                 <c:pt idx="32">
-                  <c:v>15.687294</c:v>
+                  <c:v>18.174777</c:v>
                 </c:pt>
                 <c:pt idx="33">
-                  <c:v>8.934157</c:v>
+                  <c:v>6.305687</c:v>
                 </c:pt>
                 <c:pt idx="34">
-                  <c:v>13.131984</c:v>
+                  <c:v>10.409804</c:v>
                 </c:pt>
                 <c:pt idx="35">
-                  <c:v>20.110836</c:v>
+                  <c:v>20.616798</c:v>
                 </c:pt>
                 <c:pt idx="36">
-                  <c:v>26.894615</c:v>
+                  <c:v>43.803253</c:v>
                 </c:pt>
                 <c:pt idx="37">
-                  <c:v>30.380545</c:v>
+                  <c:v>41.486285</c:v>
                 </c:pt>
                 <c:pt idx="38">
-                  <c:v>31.611349</c:v>
+                  <c:v>26.348626</c:v>
                 </c:pt>
                 <c:pt idx="39">
-                  <c:v>55.597549</c:v>
+                  <c:v>62.284845</c:v>
                 </c:pt>
                 <c:pt idx="40">
-                  <c:v>60.02064</c:v>
+                  <c:v>54.5928</c:v>
                 </c:pt>
                 <c:pt idx="41">
-                  <c:v>63.630046</c:v>
+                  <c:v>74.548376</c:v>
                 </c:pt>
                 <c:pt idx="42">
-                  <c:v>85.133014</c:v>
+                  <c:v>58.59979</c:v>
                 </c:pt>
                 <c:pt idx="43">
-                  <c:v>93.289426</c:v>
+                  <c:v>80.285474</c:v>
                 </c:pt>
                 <c:pt idx="44">
-                  <c:v>141.681555</c:v>
+                  <c:v>90.383836</c:v>
                 </c:pt>
                 <c:pt idx="45">
-                  <c:v>136.408007</c:v>
+                  <c:v>115.176959</c:v>
                 </c:pt>
                 <c:pt idx="46">
-                  <c:v>148.381465</c:v>
+                  <c:v>188.236901</c:v>
                 </c:pt>
                 <c:pt idx="47">
-                  <c:v>159.800669</c:v>
+                  <c:v>136.872316</c:v>
                 </c:pt>
                 <c:pt idx="48">
-                  <c:v>153.521199</c:v>
+                  <c:v>115.534601</c:v>
                 </c:pt>
                 <c:pt idx="49">
-                  <c:v>221.599095</c:v>
+                  <c:v>281.200297</c:v>
                 </c:pt>
                 <c:pt idx="50">
-                  <c:v>211.750973</c:v>
+                  <c:v>340.476231</c:v>
                 </c:pt>
                 <c:pt idx="51">
-                  <c:v>293.869958</c:v>
+                  <c:v>247.320348</c:v>
                 </c:pt>
                 <c:pt idx="52">
-                  <c:v>271.593679</c:v>
+                  <c:v>304.324982</c:v>
                 </c:pt>
                 <c:pt idx="53">
-                  <c:v>328.537725</c:v>
+                  <c:v>339.136617</c:v>
                 </c:pt>
                 <c:pt idx="54">
-                  <c:v>370.178806</c:v>
+                  <c:v>377.957101</c:v>
                 </c:pt>
                 <c:pt idx="55">
-                  <c:v>471.394713</c:v>
+                  <c:v>356.060252</c:v>
                 </c:pt>
                 <c:pt idx="56">
-                  <c:v>384.06305</c:v>
+                  <c:v>209.026283</c:v>
                 </c:pt>
                 <c:pt idx="57">
-                  <c:v>493.561404</c:v>
+                  <c:v>537.684553</c:v>
                 </c:pt>
                 <c:pt idx="58">
-                  <c:v>534.701958</c:v>
+                  <c:v>742.026462</c:v>
                 </c:pt>
                 <c:pt idx="59">
-                  <c:v>605.6644</c:v>
+                  <c:v>585.495362</c:v>
                 </c:pt>
                 <c:pt idx="60">
-                  <c:v>720.101527</c:v>
+                  <c:v>746.716506</c:v>
                 </c:pt>
                 <c:pt idx="61">
-                  <c:v>429.139693</c:v>
+                  <c:v>571.025203</c:v>
                 </c:pt>
                 <c:pt idx="62">
-                  <c:v>730.309522</c:v>
+                  <c:v>934.535557</c:v>
                 </c:pt>
                 <c:pt idx="63">
-                  <c:v>706.457976</c:v>
+                  <c:v>774.007313</c:v>
                 </c:pt>
                 <c:pt idx="64">
-                  <c:v>769.758564</c:v>
+                  <c:v>788.200416</c:v>
                 </c:pt>
                 <c:pt idx="65">
-                  <c:v>752.326198</c:v>
+                  <c:v>853.240366</c:v>
                 </c:pt>
                 <c:pt idx="66">
-                  <c:v>844.072529</c:v>
+                  <c:v>721.699544</c:v>
                 </c:pt>
                 <c:pt idx="67">
-                  <c:v>911.742977</c:v>
+                  <c:v>954.728496</c:v>
                 </c:pt>
                 <c:pt idx="68">
-                  <c:v>989.051921</c:v>
+                  <c:v>834.438057</c:v>
                 </c:pt>
                 <c:pt idx="69">
-                  <c:v>1046.923918</c:v>
+                  <c:v>807.179778</c:v>
                 </c:pt>
                 <c:pt idx="70">
-                  <c:v>865.785956</c:v>
+                  <c:v>649.476036</c:v>
                 </c:pt>
                 <c:pt idx="71">
-                  <c:v>1107.241494</c:v>
+                  <c:v>999.422508</c:v>
                 </c:pt>
                 <c:pt idx="72">
-                  <c:v>1177.814627</c:v>
+                  <c:v>787.194286</c:v>
                 </c:pt>
                 <c:pt idx="73">
-                  <c:v>1149.275189</c:v>
+                  <c:v>1709.053295</c:v>
                 </c:pt>
                 <c:pt idx="74">
-                  <c:v>1188.668498</c:v>
+                  <c:v>1572.620924</c:v>
                 </c:pt>
                 <c:pt idx="75">
-                  <c:v>1196.056556</c:v>
+                  <c:v>622.712087</c:v>
                 </c:pt>
                 <c:pt idx="76">
-                  <c:v>1332.136658</c:v>
+                  <c:v>768.817677</c:v>
                 </c:pt>
                 <c:pt idx="77">
-                  <c:v>1342.50119</c:v>
+                  <c:v>1097.076153</c:v>
                 </c:pt>
                 <c:pt idx="78">
-                  <c:v>1396.510944</c:v>
+                  <c:v>1879.986268</c:v>
                 </c:pt>
                 <c:pt idx="79">
-                  <c:v>1497.327143</c:v>
+                  <c:v>2848.864217</c:v>
                 </c:pt>
                 <c:pt idx="80">
-                  <c:v>1611.036366</c:v>
+                  <c:v>975.996975</c:v>
                 </c:pt>
                 <c:pt idx="81">
-                  <c:v>1711.867565</c:v>
+                  <c:v>2111.854744</c:v>
                 </c:pt>
                 <c:pt idx="82">
-                  <c:v>1213.207282</c:v>
+                  <c:v>876.944603</c:v>
                 </c:pt>
                 <c:pt idx="83">
-                  <c:v>1919.659971</c:v>
+                  <c:v>1523.313234</c:v>
                 </c:pt>
                 <c:pt idx="84">
-                  <c:v>1934.914688</c:v>
+                  <c:v>3301.463111</c:v>
                 </c:pt>
                 <c:pt idx="85">
-                  <c:v>2020.871073</c:v>
+                  <c:v>1776.108231</c:v>
                 </c:pt>
                 <c:pt idx="86">
-                  <c:v>1349.661994</c:v>
+                  <c:v>947.980305</c:v>
                 </c:pt>
                 <c:pt idx="87">
-                  <c:v>1565.882949</c:v>
+                  <c:v>1788.208357</c:v>
                 </c:pt>
                 <c:pt idx="88">
-                  <c:v>2289.050671</c:v>
+                  <c:v>2687.526089</c:v>
                 </c:pt>
                 <c:pt idx="89">
-                  <c:v>2164.959166</c:v>
+                  <c:v>3185.645281</c:v>
                 </c:pt>
                 <c:pt idx="90">
-                  <c:v>1748.106984</c:v>
+                  <c:v>2835.356365</c:v>
                 </c:pt>
                 <c:pt idx="91">
-                  <c:v>1774.982863</c:v>
+                  <c:v>878.246216</c:v>
                 </c:pt>
                 <c:pt idx="92">
-                  <c:v>2431.445212</c:v>
+                  <c:v>2018.291477</c:v>
                 </c:pt>
                 <c:pt idx="93">
-                  <c:v>2366.376774</c:v>
+                  <c:v>4247.809773</c:v>
                 </c:pt>
                 <c:pt idx="94">
-                  <c:v>2190.94118</c:v>
+                  <c:v>1735.38746</c:v>
                 </c:pt>
                 <c:pt idx="95">
-                  <c:v>2343.009056</c:v>
+                  <c:v>4267.502116</c:v>
                 </c:pt>
                 <c:pt idx="96">
-                  <c:v>2540.48585</c:v>
+                  <c:v>2911.321345</c:v>
                 </c:pt>
                 <c:pt idx="97">
-                  <c:v>2462.2867</c:v>
+                  <c:v>1608.714272</c:v>
                 </c:pt>
                 <c:pt idx="98">
-                  <c:v>2428.318927</c:v>
+                  <c:v>3012.083264</c:v>
                 </c:pt>
                 <c:pt idx="99">
-                  <c:v>2770.962167</c:v>
+                  <c:v>1973.974147</c:v>
                 </c:pt>
                 <c:pt idx="100">
-                  <c:v>2719.39605</c:v>
+                  <c:v>1800.290277</c:v>
                 </c:pt>
                 <c:pt idx="101">
-                  <c:v>2565.06414</c:v>
+                  <c:v>1991.345603</c:v>
                 </c:pt>
                 <c:pt idx="102">
-                  <c:v>2591.39877</c:v>
+                  <c:v>2817.087775</c:v>
                 </c:pt>
                 <c:pt idx="103">
-                  <c:v>2781.238172</c:v>
+                  <c:v>3438.475227</c:v>
                 </c:pt>
                 <c:pt idx="104">
-                  <c:v>3026.023212</c:v>
+                  <c:v>3659.710285</c:v>
                 </c:pt>
                 <c:pt idx="105">
-                  <c:v>3120.916383</c:v>
+                  <c:v>5990.868666</c:v>
                 </c:pt>
                 <c:pt idx="106">
-                  <c:v>3183.334711</c:v>
+                  <c:v>2824.236442</c:v>
                 </c:pt>
                 <c:pt idx="107">
-                  <c:v>3247.001405</c:v>
+                  <c:v>5350.374612</c:v>
                 </c:pt>
                 <c:pt idx="108">
-                  <c:v>3311.941433</c:v>
+                  <c:v>4272.880764</c:v>
                 </c:pt>
                 <c:pt idx="109">
-                  <c:v>3378.180262</c:v>
+                  <c:v>2315.475173</c:v>
+                </c:pt>
+                <c:pt idx="110">
+                  <c:v>4617.655772</c:v>
+                </c:pt>
+                <c:pt idx="111">
+                  <c:v>4705.895659</c:v>
+                </c:pt>
+                <c:pt idx="112">
+                  <c:v>3188.94795</c:v>
+                </c:pt>
+                <c:pt idx="113">
+                  <c:v>2206.266718</c:v>
+                </c:pt>
+                <c:pt idx="114">
+                  <c:v>4990.520363</c:v>
+                </c:pt>
+                <c:pt idx="115">
+                  <c:v>2362.00759</c:v>
+                </c:pt>
+                <c:pt idx="116">
+                  <c:v>2614.008207</c:v>
+                </c:pt>
+                <c:pt idx="117">
+                  <c:v>3671.263295</c:v>
+                </c:pt>
+                <c:pt idx="118">
+                  <c:v>4581.279728</c:v>
+                </c:pt>
+                <c:pt idx="119">
+                  <c:v>2254.548452</c:v>
+                </c:pt>
+                <c:pt idx="120">
+                  <c:v>4469.937836</c:v>
+                </c:pt>
+                <c:pt idx="121">
+                  <c:v>3760.664502</c:v>
+                </c:pt>
+                <c:pt idx="122">
+                  <c:v>3835.877792</c:v>
+                </c:pt>
+                <c:pt idx="123">
+                  <c:v>3912.595348</c:v>
+                </c:pt>
+                <c:pt idx="124">
+                  <c:v>3990.847255</c:v>
+                </c:pt>
+                <c:pt idx="125">
+                  <c:v>4070.6642</c:v>
                 </c:pt>
               </c:numCache>
             </c:numRef>
@@ -845,9 +941,9 @@
           </c:marker>
           <c:cat>
             <c:strRef>
-              <c:f>Sheet1!$A$2:$A$111</c:f>
+              <c:f>Sheet1!$A$2:$A$127</c:f>
               <c:strCache>
-                <c:ptCount val="110"/>
+                <c:ptCount val="126"/>
                 <c:pt idx="0">
                   <c:v>05-03</c:v>
                 </c:pt>
@@ -1177,345 +1273,441 @@
                 </c:pt>
                 <c:pt idx="109">
                   <c:v>06-05</c:v>
+                </c:pt>
+                <c:pt idx="110">
+                  <c:v>06-12</c:v>
+                </c:pt>
+                <c:pt idx="111">
+                  <c:v>06-19</c:v>
+                </c:pt>
+                <c:pt idx="112">
+                  <c:v>06-26</c:v>
+                </c:pt>
+                <c:pt idx="113">
+                  <c:v>07-03</c:v>
+                </c:pt>
+                <c:pt idx="114">
+                  <c:v>07-10</c:v>
+                </c:pt>
+                <c:pt idx="115">
+                  <c:v>07-17</c:v>
+                </c:pt>
+                <c:pt idx="116">
+                  <c:v>07-24</c:v>
+                </c:pt>
+                <c:pt idx="117">
+                  <c:v>07-31</c:v>
+                </c:pt>
+                <c:pt idx="118">
+                  <c:v>08-07</c:v>
+                </c:pt>
+                <c:pt idx="119">
+                  <c:v>08-14</c:v>
+                </c:pt>
+                <c:pt idx="120">
+                  <c:v>08-21</c:v>
+                </c:pt>
+                <c:pt idx="121">
+                  <c:v>08-28</c:v>
+                </c:pt>
+                <c:pt idx="122">
+                  <c:v>09-04</c:v>
+                </c:pt>
+                <c:pt idx="123">
+                  <c:v>09-11</c:v>
+                </c:pt>
+                <c:pt idx="124">
+                  <c:v>09-18</c:v>
+                </c:pt>
+                <c:pt idx="125">
+                  <c:v>09-25</c:v>
                 </c:pt>
               </c:strCache>
             </c:strRef>
           </c:cat>
           <c:val>
             <c:numRef>
-              <c:f>Sheet1!$C$2:$C$111</c:f>
+              <c:f>Sheet1!$C$2:$C$127</c:f>
               <c:numCache>
                 <c:formatCode>General</c:formatCode>
-                <c:ptCount val="110"/>
+                <c:ptCount val="126"/>
                 <c:pt idx="0">
-                  <c:v>5.290623</c:v>
+                  <c:v>5.818709</c:v>
                 </c:pt>
                 <c:pt idx="1">
-                  <c:v>5.472922</c:v>
+                  <c:v>3.261568</c:v>
                 </c:pt>
                 <c:pt idx="2">
-                  <c:v>5.63467</c:v>
+                  <c:v>7.369606</c:v>
                 </c:pt>
                 <c:pt idx="3">
-                  <c:v>5.635995</c:v>
+                  <c:v>3.046234</c:v>
                 </c:pt>
                 <c:pt idx="4">
-                  <c:v>4.366822</c:v>
+                  <c:v>5.400233</c:v>
                 </c:pt>
                 <c:pt idx="5">
-                  <c:v>5.554632</c:v>
+                  <c:v>4.164391</c:v>
                 </c:pt>
                 <c:pt idx="6">
-                  <c:v>5.487589</c:v>
+                  <c:v>4.779678</c:v>
                 </c:pt>
                 <c:pt idx="7">
-                  <c:v>5.115128</c:v>
+                  <c:v>5.219966</c:v>
                 </c:pt>
                 <c:pt idx="8">
-                  <c:v>5.276528</c:v>
+                  <c:v>3.129535</c:v>
                 </c:pt>
                 <c:pt idx="9">
-                  <c:v>3.623258</c:v>
+                  <c:v>6.804459</c:v>
                 </c:pt>
                 <c:pt idx="10">
-                  <c:v>6.025185</c:v>
+                  <c:v>6.663102</c:v>
                 </c:pt>
                 <c:pt idx="11">
-                  <c:v>5.40372</c:v>
+                  <c:v>7.614815</c:v>
                 </c:pt>
                 <c:pt idx="12">
-                  <c:v>5.313</c:v>
+                  <c:v>3.98908</c:v>
                 </c:pt>
                 <c:pt idx="13">
-                  <c:v>5.086316</c:v>
+                  <c:v>3.674594</c:v>
                 </c:pt>
                 <c:pt idx="14">
-                  <c:v>4.79909</c:v>
+                  <c:v>5.151151</c:v>
                 </c:pt>
                 <c:pt idx="15">
-                  <c:v>4.934553</c:v>
+                  <c:v>3.122028</c:v>
                 </c:pt>
                 <c:pt idx="16">
-                  <c:v>4.764803</c:v>
+                  <c:v>2.812284</c:v>
                 </c:pt>
                 <c:pt idx="17">
-                  <c:v>5.150567</c:v>
+                  <c:v>7.355921</c:v>
                 </c:pt>
                 <c:pt idx="18">
-                  <c:v>4.520566</c:v>
+                  <c:v>4.709681</c:v>
                 </c:pt>
                 <c:pt idx="19">
-                  <c:v>5.428932</c:v>
+                  <c:v>7.775464</c:v>
                 </c:pt>
                 <c:pt idx="20">
-                  <c:v>5.366327</c:v>
+                  <c:v>2.974182</c:v>
                 </c:pt>
                 <c:pt idx="21">
-                  <c:v>5.278915</c:v>
+                  <c:v>3.906825</c:v>
                 </c:pt>
                 <c:pt idx="22">
-                  <c:v>5.1686</c:v>
+                  <c:v>3.48744</c:v>
                 </c:pt>
                 <c:pt idx="23">
-                  <c:v>4.708993</c:v>
+                  <c:v>6.259975</c:v>
                 </c:pt>
                 <c:pt idx="24">
-                  <c:v>5.18846</c:v>
+                  <c:v>7.286882</c:v>
                 </c:pt>
                 <c:pt idx="25">
-                  <c:v>4.853683</c:v>
+                  <c:v>3.058968</c:v>
                 </c:pt>
                 <c:pt idx="26">
-                  <c:v>4.842223</c:v>
+                  <c:v>5.382489</c:v>
                 </c:pt>
                 <c:pt idx="27">
-                  <c:v>4.914933</c:v>
+                  <c:v>3.800708</c:v>
                 </c:pt>
                 <c:pt idx="28">
-                  <c:v>6.582409</c:v>
+                  <c:v>4.877718</c:v>
                 </c:pt>
                 <c:pt idx="29">
-                  <c:v>6.580299</c:v>
+                  <c:v>3.943122</c:v>
                 </c:pt>
                 <c:pt idx="30">
-                  <c:v>3.932579</c:v>
+                  <c:v>3.413976</c:v>
                 </c:pt>
                 <c:pt idx="31">
-                  <c:v>3.968704</c:v>
+                  <c:v>3.907791</c:v>
                 </c:pt>
                 <c:pt idx="32">
-                  <c:v>7.316988</c:v>
+                  <c:v>8.935267</c:v>
                 </c:pt>
                 <c:pt idx="33">
-                  <c:v>4.167138</c:v>
+                  <c:v>3.100065</c:v>
                 </c:pt>
                 <c:pt idx="34">
-                  <c:v>6.125121</c:v>
+                  <c:v>5.117773</c:v>
                 </c:pt>
                 <c:pt idx="35">
-                  <c:v>3.311256</c:v>
+                  <c:v>3.227086</c:v>
                 </c:pt>
                 <c:pt idx="36">
-                  <c:v>4.428208</c:v>
+                  <c:v>6.856393</c:v>
                 </c:pt>
                 <c:pt idx="37">
-                  <c:v>5.002168</c:v>
+                  <c:v>6.493725</c:v>
                 </c:pt>
                 <c:pt idx="38">
-                  <c:v>5.20482</c:v>
+                  <c:v>4.124272</c:v>
                 </c:pt>
                 <c:pt idx="39">
-                  <c:v>9.154156</c:v>
+                  <c:v>9.749262</c:v>
                 </c:pt>
                 <c:pt idx="40">
-                  <c:v>6.134223</c:v>
+                  <c:v>9.233563</c:v>
                 </c:pt>
                 <c:pt idx="41">
-                  <c:v>6.503111</c:v>
+                  <c:v>12.608753</c:v>
                 </c:pt>
                 <c:pt idx="42">
-                  <c:v>8.700755</c:v>
+                  <c:v>9.911286</c:v>
                 </c:pt>
                 <c:pt idx="43">
-                  <c:v>9.534356</c:v>
+                  <c:v>13.579098</c:v>
                 </c:pt>
                 <c:pt idx="44">
-                  <c:v>9.624129</c:v>
+                  <c:v>7.545238</c:v>
                 </c:pt>
                 <c:pt idx="45">
-                  <c:v>9.265908</c:v>
+                  <c:v>9.614967</c:v>
                 </c:pt>
                 <c:pt idx="46">
-                  <c:v>10.07924</c:v>
+                  <c:v>15.714008</c:v>
                 </c:pt>
                 <c:pt idx="47">
-                  <c:v>10.854922</c:v>
+                  <c:v>11.426095</c:v>
                 </c:pt>
                 <c:pt idx="48">
-                  <c:v>14.374245</c:v>
+                  <c:v>10.634353</c:v>
                 </c:pt>
                 <c:pt idx="49">
-                  <c:v>20.748403</c:v>
+                  <c:v>25.88301</c:v>
                 </c:pt>
                 <c:pt idx="50">
-                  <c:v>19.82632</c:v>
+                  <c:v>31.339048</c:v>
                 </c:pt>
                 <c:pt idx="51">
-                  <c:v>27.51515</c:v>
+                  <c:v>22.764539</c:v>
                 </c:pt>
                 <c:pt idx="52">
-                  <c:v>52.947857</c:v>
+                  <c:v>70.101158</c:v>
                 </c:pt>
                 <c:pt idx="53">
-                  <c:v>64.049239</c:v>
+                  <c:v>78.120007</c:v>
                 </c:pt>
                 <c:pt idx="54">
-                  <c:v>72.167271</c:v>
+                  <c:v>87.062292</c:v>
                 </c:pt>
                 <c:pt idx="55">
-                  <c:v>91.899561</c:v>
+                  <c:v>82.018361</c:v>
                 </c:pt>
                 <c:pt idx="56">
-                  <c:v>74.874038</c:v>
+                  <c:v>48.149135</c:v>
                 </c:pt>
                 <c:pt idx="57">
-                  <c:v>194.483046</c:v>
+                  <c:v>413.729391</c:v>
                 </c:pt>
                 <c:pt idx="58">
-                  <c:v>210.694079</c:v>
+                  <c:v>570.963317</c:v>
                 </c:pt>
                 <c:pt idx="59">
-                  <c:v>238.656136</c:v>
+                  <c:v>450.51813</c:v>
                 </c:pt>
                 <c:pt idx="60">
-                  <c:v>283.748968</c:v>
+                  <c:v>574.572142</c:v>
                 </c:pt>
                 <c:pt idx="61">
-                  <c:v>310.52569</c:v>
+                  <c:v>384.6014</c:v>
                 </c:pt>
                 <c:pt idx="62">
-                  <c:v>528.452325</c:v>
+                  <c:v>629.435761</c:v>
                 </c:pt>
                 <c:pt idx="63">
-                  <c:v>511.193335</c:v>
+                  <c:v>521.315512</c:v>
                 </c:pt>
                 <c:pt idx="64">
-                  <c:v>556.997671</c:v>
+                  <c:v>530.874962</c:v>
                 </c:pt>
                 <c:pt idx="65">
-                  <c:v>651.555866</c:v>
+                  <c:v>672.435408</c:v>
                 </c:pt>
                 <c:pt idx="66">
-                  <c:v>731.013236</c:v>
+                  <c:v>568.768599</c:v>
                 </c:pt>
                 <c:pt idx="67">
-                  <c:v>789.619566</c:v>
+                  <c:v>752.417808</c:v>
                 </c:pt>
                 <c:pt idx="68">
-                  <c:v>856.573363</c:v>
+                  <c:v>657.617382</c:v>
                 </c:pt>
                 <c:pt idx="69">
-                  <c:v>906.693695</c:v>
+                  <c:v>636.135238</c:v>
                 </c:pt>
                 <c:pt idx="70">
-                  <c:v>799.328872</c:v>
+                  <c:v>709.338504</c:v>
                 </c:pt>
                 <c:pt idx="71">
-                  <c:v>1022.250463</c:v>
+                  <c:v>1091.539683</c:v>
                 </c:pt>
                 <c:pt idx="72">
-                  <c:v>1087.406455</c:v>
+                  <c:v>859.750301</c:v>
                 </c:pt>
                 <c:pt idx="73">
-                  <c:v>1061.057682</c:v>
+                  <c:v>1866.577426</c:v>
                 </c:pt>
                 <c:pt idx="74">
-                  <c:v>1228.424547</c:v>
+                  <c:v>1542.673731</c:v>
                 </c:pt>
                 <c:pt idx="75">
-                  <c:v>1236.059704</c:v>
+                  <c:v>610.853871</c:v>
                 </c:pt>
                 <c:pt idx="76">
-                  <c:v>1376.691123</c:v>
+                  <c:v>754.177193</c:v>
                 </c:pt>
                 <c:pt idx="77">
-                  <c:v>1387.402305</c:v>
+                  <c:v>1076.184691</c:v>
                 </c:pt>
                 <c:pt idx="78">
-                  <c:v>1443.218462</c:v>
+                  <c:v>1844.185961</c:v>
                 </c:pt>
                 <c:pt idx="79">
-                  <c:v>1654.789059</c:v>
+                  <c:v>2056.587609</c:v>
                 </c:pt>
                 <c:pt idx="80">
-                  <c:v>1780.456171</c:v>
+                  <c:v>704.569657</c:v>
                 </c:pt>
                 <c:pt idx="81">
-                  <c:v>1891.89098</c:v>
+                  <c:v>1524.542402</c:v>
                 </c:pt>
                 <c:pt idx="82">
-                  <c:v>1340.790586</c:v>
+                  <c:v>633.06401</c:v>
                 </c:pt>
                 <c:pt idx="83">
-                  <c:v>2157.619854</c:v>
+                  <c:v>1425.412497</c:v>
                 </c:pt>
                 <c:pt idx="84">
-                  <c:v>2174.765537</c:v>
+                  <c:v>3089.283722</c:v>
                 </c:pt>
                 <c:pt idx="85">
-                  <c:v>2271.377023</c:v>
+                  <c:v>1661.960792</c:v>
                 </c:pt>
                 <c:pt idx="86">
-                  <c:v>1516.965275</c:v>
+                  <c:v>887.055232</c:v>
                 </c:pt>
                 <c:pt idx="87">
-                  <c:v>1769.179053</c:v>
+                  <c:v>1957.397297</c:v>
                 </c:pt>
                 <c:pt idx="88">
-                  <c:v>2586.234494</c:v>
+                  <c:v>2941.802773</c:v>
                 </c:pt>
                 <c:pt idx="89">
-                  <c:v>2446.032385</c:v>
+                  <c:v>3487.050846</c:v>
                 </c:pt>
                 <c:pt idx="90">
-                  <c:v>1975.060944</c:v>
+                  <c:v>3103.619813</c:v>
                 </c:pt>
                 <c:pt idx="91">
-                  <c:v>2005.426076</c:v>
+                  <c:v>961.340306</c:v>
                 </c:pt>
                 <c:pt idx="92">
-                  <c:v>2869.197054</c:v>
+                  <c:v>1760.566775</c:v>
                 </c:pt>
                 <c:pt idx="93">
-                  <c:v>2792.413842</c:v>
+                  <c:v>3705.387869</c:v>
                 </c:pt>
                 <c:pt idx="94">
-                  <c:v>2585.393226</c:v>
+                  <c:v>1513.788042</c:v>
                 </c:pt>
                 <c:pt idx="95">
-                  <c:v>2764.839053</c:v>
+                  <c:v>3722.565608</c:v>
                 </c:pt>
                 <c:pt idx="96">
-                  <c:v>3112.042916</c:v>
+                  <c:v>3795.285526</c:v>
                 </c:pt>
                 <c:pt idx="97">
-                  <c:v>3016.250565</c:v>
+                  <c:v>2097.16801</c:v>
                 </c:pt>
                 <c:pt idx="98">
-                  <c:v>2974.640742</c:v>
+                  <c:v>3926.641776</c:v>
                 </c:pt>
                 <c:pt idx="99">
-                  <c:v>3394.371663</c:v>
+                  <c:v>2573.331701</c:v>
                 </c:pt>
                 <c:pt idx="100">
-                  <c:v>3402.740504</c:v>
+                  <c:v>2775.486507</c:v>
                 </c:pt>
                 <c:pt idx="101">
-                  <c:v>3209.627243</c:v>
+                  <c:v>3070.034273</c:v>
                 </c:pt>
                 <c:pt idx="102">
-                  <c:v>3242.579381</c:v>
+                  <c:v>4343.071342</c:v>
                 </c:pt>
                 <c:pt idx="103">
-                  <c:v>3480.122648</c:v>
+                  <c:v>5301.057124</c:v>
                 </c:pt>
                 <c:pt idx="104">
-                  <c:v>3786.418587</c:v>
+                  <c:v>3252.865812</c:v>
                 </c:pt>
                 <c:pt idx="105">
-                  <c:v>3905.157025</c:v>
+                  <c:v>5324.872832</c:v>
                 </c:pt>
                 <c:pt idx="106">
-                  <c:v>3983.260165</c:v>
+                  <c:v>2510.270337</c:v>
                 </c:pt>
                 <c:pt idx="107">
-                  <c:v>4062.925369</c:v>
+                  <c:v>4755.581536</c:v>
                 </c:pt>
                 <c:pt idx="108">
-                  <c:v>4144.183876</c:v>
+                  <c:v>3797.871054</c:v>
                 </c:pt>
                 <c:pt idx="109">
-                  <c:v>4227.067553</c:v>
+                  <c:v>3268.107341</c:v>
+                </c:pt>
+                <c:pt idx="110">
+                  <c:v>6517.450458</c:v>
+                </c:pt>
+                <c:pt idx="111">
+                  <c:v>6641.993976</c:v>
+                </c:pt>
+                <c:pt idx="112">
+                  <c:v>4500.944051</c:v>
+                </c:pt>
+                <c:pt idx="113">
+                  <c:v>3018.727905</c:v>
+                </c:pt>
+                <c:pt idx="114">
+                  <c:v>6828.287331</c:v>
+                </c:pt>
+                <c:pt idx="115">
+                  <c:v>3231.820597</c:v>
+                </c:pt>
+                <c:pt idx="116">
+                  <c:v>3576.620837</c:v>
+                </c:pt>
+                <c:pt idx="117">
+                  <c:v>5023.211774</c:v>
+                </c:pt>
+                <c:pt idx="118">
+                  <c:v>5442.381277</c:v>
+                </c:pt>
+                <c:pt idx="119">
+                  <c:v>2678.315451</c:v>
+                </c:pt>
+                <c:pt idx="120">
+                  <c:v>5310.111461</c:v>
+                </c:pt>
+                <c:pt idx="121">
+                  <c:v>4467.522459</c:v>
+                </c:pt>
+                <c:pt idx="122">
+                  <c:v>4556.872908</c:v>
+                </c:pt>
+                <c:pt idx="123">
+                  <c:v>4648.010366</c:v>
+                </c:pt>
+                <c:pt idx="124">
+                  <c:v>4740.970573</c:v>
+                </c:pt>
+                <c:pt idx="125">
+                  <c:v>4835.789985</c:v>
                 </c:pt>
               </c:numCache>
             </c:numRef>
@@ -1564,8 +1756,8 @@
         <c:lblAlgn val="ctr"/>
         <c:lblOffset val="100"/>
         <c:noMultiLvlLbl val="0"/>
-        <c:tickLblSkip val="12"/>
-        <c:tickMarkSkip val="12"/>
+        <c:tickLblSkip val="14"/>
+        <c:tickMarkSkip val="14"/>
       </c:catAx>
       <c:valAx>
         <c:axId val="2140495176"/>
@@ -4818,7 +5010,7 @@
                 </a:solidFill>
                 <a:latin typeface="Montserrat Medium"/>
               </a:rPr>
-              <a:t>Crohn's Has Overtaken Ulcerative Colitis in Tremfya's IBD Mix</a:t>
+              <a:t>Crohn's and Ulcerative Colitis Are Locked in a Tight Race for Tremfya's IBD Mix</a:t>
             </a:r>
           </a:p>
         </p:txBody>
@@ -4857,7 +5049,7 @@
                 </a:solidFill>
                 <a:latin typeface="Roboto"/>
               </a:rPr>
-              <a:t>Tremfya's weekly IBD volume has scaled from ~8 to ~7,605 TRx since May 2024. Within IBD, Crohn's pulled level in Oct 2025 and now leads ulcerative colitis.</a:t>
+              <a:t>Tremfya's weekly IBD volume reached ~8,906 TRx by 09-25. The UC/CD lead has churned week to week across the series, with Crohn's edging ahead in the latest reads.</a:t>
             </a:r>
           </a:p>
         </p:txBody>
@@ -4992,7 +5184,7 @@
                 </a:solidFill>
                 <a:latin typeface="Montserrat Medium"/>
               </a:rPr>
-              <a:t>Crohn's now leads</a:t>
+              <a:t>CD edges UC</a:t>
             </a:r>
           </a:p>
         </p:txBody>
@@ -5031,7 +5223,7 @@
                 </a:solidFill>
                 <a:latin typeface="Roboto"/>
               </a:rPr>
-              <a:t>CD ~4,227 vs UC ~3,378 TRx in the latest week (06-05).</a:t>
+              <a:t>CD ~4,836 vs UC ~4,071 TRx in the latest week (09-25).</a:t>
             </a:r>
           </a:p>
         </p:txBody>
@@ -5109,7 +5301,7 @@
                 </a:solidFill>
                 <a:latin typeface="Montserrat Medium"/>
               </a:rPr>
-              <a:t>Crossover · Oct 2025</a:t>
+              <a:t>No durable leader</a:t>
             </a:r>
           </a:p>
         </p:txBody>
@@ -5148,7 +5340,7 @@
                 </a:solidFill>
                 <a:latin typeface="Roboto"/>
               </a:rPr>
-              <a:t>UC led decisively in early 2025; the two drew level by autumn before CD pulled ahead.</a:t>
+              <a:t>Neither indication holds the lead for long — weekly volatility swings the UC/CD mix throughout the series.</a:t>
             </a:r>
           </a:p>
         </p:txBody>
@@ -5226,7 +5418,7 @@
                 </a:solidFill>
                 <a:latin typeface="Montserrat Medium"/>
               </a:rPr>
-              <a:t>~962x ramp</a:t>
+              <a:t>Near-balanced split</a:t>
             </a:r>
           </a:p>
         </p:txBody>
@@ -5265,7 +5457,7 @@
                 </a:solidFill>
                 <a:latin typeface="Roboto"/>
               </a:rPr>
-              <a:t>Tremfya's IBD volume rose from ~8 to ~7,605 weekly TRx.</a:t>
+              <a:t>Latest mix: UC 46% / CD 54% of ~8,906 weekly TRx.</a:t>
             </a:r>
           </a:p>
         </p:txBody>
@@ -5401,7 +5593,7 @@
                 </a:solidFill>
                 <a:latin typeface="Roboto"/>
               </a:rPr>
-              <a:t>Within Tremfya's IBD business, Crohn's has overtaken ulcerative colitis and is the faster-growing of the two indications.</a:t>
+              <a:t>Tremfya's IBD mix is near-balanced — CD ~54% vs UC ~46% — with the weekly lead alternating rather than settled.</a:t>
             </a:r>
           </a:p>
         </p:txBody>
